--- a/chapter11/parts/part-02-active-learning-basics/clip.pptx
+++ b/chapter11/parts/part-02-active-learning-basics/clip.pptx
@@ -4863,10 +4863,12 @@
           </a:bodyPr>
           <a:lstStyle/>
           <a:p>
-            <a:pPr>
+            <a:pPr lvl="0" marL="457200" indent="-228600">
+              <a:buFont typeface="Calibri"/>
               <a:spcAft>
                 <a:spcPts val="1000"/>
               </a:spcAft>
+              <a:buSzPct val="100000"/>
               <a:buChar char="•"/>
               <a:lnSpc>
                 <a:spcPts val="2200"/>
@@ -4883,10 +4885,12 @@
             </a:r>
           </a:p>
           <a:p>
-            <a:pPr>
+            <a:pPr lvl="0" marL="457200" indent="-228600">
+              <a:buFont typeface="Calibri"/>
               <a:spcAft>
                 <a:spcPts val="1000"/>
               </a:spcAft>
+              <a:buSzPct val="100000"/>
               <a:buChar char="•"/>
               <a:lnSpc>
                 <a:spcPts val="2200"/>
@@ -4903,10 +4907,12 @@
             </a:r>
           </a:p>
           <a:p>
-            <a:pPr>
+            <a:pPr lvl="0" marL="457200" indent="-228600">
+              <a:buFont typeface="Calibri"/>
               <a:spcAft>
                 <a:spcPts val="1000"/>
               </a:spcAft>
+              <a:buSzPct val="100000"/>
               <a:buChar char="•"/>
               <a:lnSpc>
                 <a:spcPts val="2200"/>
@@ -5042,10 +5048,12 @@
           </a:bodyPr>
           <a:lstStyle/>
           <a:p>
-            <a:pPr>
+            <a:pPr lvl="0" marL="457200" indent="-228600">
+              <a:buFont typeface="Calibri"/>
               <a:spcAft>
                 <a:spcPts val="1000"/>
               </a:spcAft>
+              <a:buSzPct val="100000"/>
               <a:buChar char="•"/>
               <a:lnSpc>
                 <a:spcPts val="2200"/>
@@ -5062,10 +5070,12 @@
             </a:r>
           </a:p>
           <a:p>
-            <a:pPr>
+            <a:pPr lvl="0" marL="457200" indent="-228600">
+              <a:buFont typeface="Calibri"/>
               <a:spcAft>
                 <a:spcPts val="1000"/>
               </a:spcAft>
+              <a:buSzPct val="100000"/>
               <a:buChar char="•"/>
               <a:lnSpc>
                 <a:spcPts val="2200"/>
@@ -5082,10 +5092,12 @@
             </a:r>
           </a:p>
           <a:p>
-            <a:pPr>
+            <a:pPr lvl="0" marL="457200" indent="-228600">
+              <a:buFont typeface="Calibri"/>
               <a:spcAft>
                 <a:spcPts val="1000"/>
               </a:spcAft>
+              <a:buSzPct val="100000"/>
               <a:buChar char="•"/>
               <a:lnSpc>
                 <a:spcPts val="2200"/>
@@ -5102,10 +5114,12 @@
             </a:r>
           </a:p>
           <a:p>
-            <a:pPr>
+            <a:pPr lvl="0" marL="457200" indent="-228600">
+              <a:buFont typeface="Calibri"/>
               <a:spcAft>
                 <a:spcPts val="1000"/>
               </a:spcAft>
+              <a:buSzPct val="100000"/>
               <a:buChar char="•"/>
               <a:lnSpc>
                 <a:spcPts val="2200"/>
@@ -5122,10 +5136,12 @@
             </a:r>
           </a:p>
           <a:p>
-            <a:pPr>
+            <a:pPr lvl="0" marL="457200" indent="-228600">
+              <a:buFont typeface="Calibri"/>
               <a:spcAft>
                 <a:spcPts val="1000"/>
               </a:spcAft>
+              <a:buSzPct val="100000"/>
               <a:buChar char="•"/>
               <a:lnSpc>
                 <a:spcPts val="2200"/>
@@ -5261,10 +5277,12 @@
           </a:bodyPr>
           <a:lstStyle/>
           <a:p>
-            <a:pPr>
+            <a:pPr lvl="0" marL="457200" indent="-228600">
+              <a:buFont typeface="Calibri"/>
               <a:spcAft>
                 <a:spcPts val="1000"/>
               </a:spcAft>
+              <a:buSzPct val="100000"/>
               <a:buChar char="•"/>
               <a:lnSpc>
                 <a:spcPts val="2200"/>
@@ -5281,10 +5299,12 @@
             </a:r>
           </a:p>
           <a:p>
-            <a:pPr>
+            <a:pPr lvl="0" marL="457200" indent="-228600">
+              <a:buFont typeface="Calibri"/>
               <a:spcAft>
                 <a:spcPts val="1000"/>
               </a:spcAft>
+              <a:buSzPct val="100000"/>
               <a:buChar char="•"/>
               <a:lnSpc>
                 <a:spcPts val="2200"/>
@@ -5301,10 +5321,12 @@
             </a:r>
           </a:p>
           <a:p>
-            <a:pPr>
+            <a:pPr lvl="0" marL="457200" indent="-228600">
+              <a:buFont typeface="Calibri"/>
               <a:spcAft>
                 <a:spcPts val="1000"/>
               </a:spcAft>
+              <a:buSzPct val="100000"/>
               <a:buChar char="•"/>
               <a:lnSpc>
                 <a:spcPts val="2200"/>
@@ -5440,10 +5462,12 @@
           </a:bodyPr>
           <a:lstStyle/>
           <a:p>
-            <a:pPr>
+            <a:pPr lvl="0" marL="457200" indent="-228600">
+              <a:buFont typeface="Calibri"/>
               <a:spcAft>
                 <a:spcPts val="1000"/>
               </a:spcAft>
+              <a:buSzPct val="100000"/>
               <a:buChar char="•"/>
               <a:lnSpc>
                 <a:spcPts val="2200"/>
@@ -5460,10 +5484,12 @@
             </a:r>
           </a:p>
           <a:p>
-            <a:pPr>
+            <a:pPr lvl="0" marL="457200" indent="-228600">
+              <a:buFont typeface="Calibri"/>
               <a:spcAft>
                 <a:spcPts val="1000"/>
               </a:spcAft>
+              <a:buSzPct val="100000"/>
               <a:buChar char="•"/>
               <a:lnSpc>
                 <a:spcPts val="2200"/>
@@ -5599,10 +5625,12 @@
           </a:bodyPr>
           <a:lstStyle/>
           <a:p>
-            <a:pPr>
+            <a:pPr lvl="0" marL="457200" indent="-228600">
+              <a:buFont typeface="Calibri"/>
               <a:spcAft>
                 <a:spcPts val="1000"/>
               </a:spcAft>
+              <a:buSzPct val="100000"/>
               <a:buChar char="•"/>
               <a:lnSpc>
                 <a:spcPts val="2200"/>
@@ -5738,10 +5766,12 @@
           </a:bodyPr>
           <a:lstStyle/>
           <a:p>
-            <a:pPr>
+            <a:pPr lvl="0" marL="457200" indent="-228600">
+              <a:buFont typeface="Calibri"/>
               <a:spcAft>
                 <a:spcPts val="1000"/>
               </a:spcAft>
+              <a:buSzPct val="100000"/>
               <a:buChar char="•"/>
               <a:lnSpc>
                 <a:spcPts val="2200"/>
@@ -5758,10 +5788,12 @@
             </a:r>
           </a:p>
           <a:p>
-            <a:pPr>
+            <a:pPr lvl="0" marL="457200" indent="-228600">
+              <a:buFont typeface="Calibri"/>
               <a:spcAft>
                 <a:spcPts val="1000"/>
               </a:spcAft>
+              <a:buSzPct val="100000"/>
               <a:buChar char="•"/>
               <a:lnSpc>
                 <a:spcPts val="2200"/>
@@ -5778,10 +5810,12 @@
             </a:r>
           </a:p>
           <a:p>
-            <a:pPr>
+            <a:pPr lvl="0" marL="457200" indent="-228600">
+              <a:buFont typeface="Calibri"/>
               <a:spcAft>
                 <a:spcPts val="1000"/>
               </a:spcAft>
+              <a:buSzPct val="100000"/>
               <a:buChar char="•"/>
               <a:lnSpc>
                 <a:spcPts val="2200"/>
@@ -5917,10 +5951,12 @@
           </a:bodyPr>
           <a:lstStyle/>
           <a:p>
-            <a:pPr>
+            <a:pPr lvl="0" marL="457200" indent="-228600">
+              <a:buFont typeface="Calibri"/>
               <a:spcAft>
                 <a:spcPts val="1000"/>
               </a:spcAft>
+              <a:buSzPct val="100000"/>
               <a:buChar char="•"/>
               <a:lnSpc>
                 <a:spcPts val="2200"/>
@@ -5937,10 +5973,12 @@
             </a:r>
           </a:p>
           <a:p>
-            <a:pPr>
+            <a:pPr lvl="0" marL="457200" indent="-228600">
+              <a:buFont typeface="Calibri"/>
               <a:spcAft>
                 <a:spcPts val="1000"/>
               </a:spcAft>
+              <a:buSzPct val="100000"/>
               <a:buChar char="•"/>
               <a:lnSpc>
                 <a:spcPts val="2200"/>
@@ -5957,10 +5995,12 @@
             </a:r>
           </a:p>
           <a:p>
-            <a:pPr>
+            <a:pPr lvl="0" marL="457200" indent="-228600">
+              <a:buFont typeface="Calibri"/>
               <a:spcAft>
                 <a:spcPts val="1000"/>
               </a:spcAft>
+              <a:buSzPct val="100000"/>
               <a:buChar char="•"/>
               <a:lnSpc>
                 <a:spcPts val="2200"/>
@@ -5977,10 +6017,12 @@
             </a:r>
           </a:p>
           <a:p>
-            <a:pPr>
+            <a:pPr lvl="0" marL="457200" indent="-228600">
+              <a:buFont typeface="Calibri"/>
               <a:spcAft>
                 <a:spcPts val="1000"/>
               </a:spcAft>
+              <a:buSzPct val="100000"/>
               <a:buChar char="•"/>
               <a:lnSpc>
                 <a:spcPts val="2200"/>
@@ -5997,10 +6039,12 @@
             </a:r>
           </a:p>
           <a:p>
-            <a:pPr>
+            <a:pPr lvl="0" marL="457200" indent="-228600">
+              <a:buFont typeface="Calibri"/>
               <a:spcAft>
                 <a:spcPts val="1000"/>
               </a:spcAft>
+              <a:buSzPct val="100000"/>
               <a:buChar char="•"/>
               <a:lnSpc>
                 <a:spcPts val="2200"/>
@@ -6136,10 +6180,12 @@
           </a:bodyPr>
           <a:lstStyle/>
           <a:p>
-            <a:pPr>
+            <a:pPr lvl="0" marL="457200" indent="-228600">
+              <a:buFont typeface="Calibri"/>
               <a:spcAft>
                 <a:spcPts val="1000"/>
               </a:spcAft>
+              <a:buSzPct val="100000"/>
               <a:buChar char="•"/>
               <a:lnSpc>
                 <a:spcPts val="2200"/>
@@ -6156,10 +6202,12 @@
             </a:r>
           </a:p>
           <a:p>
-            <a:pPr>
+            <a:pPr lvl="0" marL="457200" indent="-228600">
+              <a:buFont typeface="Calibri"/>
               <a:spcAft>
                 <a:spcPts val="1000"/>
               </a:spcAft>
+              <a:buSzPct val="100000"/>
               <a:buChar char="•"/>
               <a:lnSpc>
                 <a:spcPts val="2200"/>
@@ -6176,10 +6224,12 @@
             </a:r>
           </a:p>
           <a:p>
-            <a:pPr>
+            <a:pPr lvl="0" marL="457200" indent="-228600">
+              <a:buFont typeface="Calibri"/>
               <a:spcAft>
                 <a:spcPts val="1000"/>
               </a:spcAft>
+              <a:buSzPct val="100000"/>
               <a:buChar char="•"/>
               <a:lnSpc>
                 <a:spcPts val="2200"/>
@@ -6196,10 +6246,12 @@
             </a:r>
           </a:p>
           <a:p>
-            <a:pPr>
+            <a:pPr lvl="0" marL="457200" indent="-228600">
+              <a:buFont typeface="Calibri"/>
               <a:spcAft>
                 <a:spcPts val="1000"/>
               </a:spcAft>
+              <a:buSzPct val="100000"/>
               <a:buChar char="•"/>
               <a:lnSpc>
                 <a:spcPts val="2200"/>
@@ -6216,10 +6268,12 @@
             </a:r>
           </a:p>
           <a:p>
-            <a:pPr>
+            <a:pPr lvl="0" marL="457200" indent="-228600">
+              <a:buFont typeface="Calibri"/>
               <a:spcAft>
                 <a:spcPts val="1000"/>
               </a:spcAft>
+              <a:buSzPct val="100000"/>
               <a:buChar char="•"/>
               <a:lnSpc>
                 <a:spcPts val="2200"/>
@@ -6818,10 +6872,12 @@
           </a:bodyPr>
           <a:lstStyle/>
           <a:p>
-            <a:pPr>
+            <a:pPr lvl="0" marL="457200" indent="-228600">
+              <a:buFont typeface="Calibri"/>
               <a:spcAft>
                 <a:spcPts val="1000"/>
               </a:spcAft>
+              <a:buSzPct val="100000"/>
               <a:buChar char="•"/>
               <a:lnSpc>
                 <a:spcPts val="2200"/>
@@ -6838,10 +6894,12 @@
             </a:r>
           </a:p>
           <a:p>
-            <a:pPr>
+            <a:pPr lvl="0" marL="457200" indent="-228600">
+              <a:buFont typeface="Calibri"/>
               <a:spcAft>
                 <a:spcPts val="1000"/>
               </a:spcAft>
+              <a:buSzPct val="100000"/>
               <a:buChar char="•"/>
               <a:lnSpc>
                 <a:spcPts val="2200"/>
@@ -6858,10 +6916,12 @@
             </a:r>
           </a:p>
           <a:p>
-            <a:pPr>
+            <a:pPr lvl="0" marL="457200" indent="-228600">
+              <a:buFont typeface="Calibri"/>
               <a:spcAft>
                 <a:spcPts val="1000"/>
               </a:spcAft>
+              <a:buSzPct val="100000"/>
               <a:buChar char="•"/>
               <a:lnSpc>
                 <a:spcPts val="2200"/>
@@ -6878,10 +6938,12 @@
             </a:r>
           </a:p>
           <a:p>
-            <a:pPr>
+            <a:pPr lvl="0" marL="457200" indent="-228600">
+              <a:buFont typeface="Calibri"/>
               <a:spcAft>
                 <a:spcPts val="1000"/>
               </a:spcAft>
+              <a:buSzPct val="100000"/>
               <a:buChar char="•"/>
               <a:lnSpc>
                 <a:spcPts val="2200"/>
@@ -6898,10 +6960,12 @@
             </a:r>
           </a:p>
           <a:p>
-            <a:pPr>
+            <a:pPr lvl="0" marL="457200" indent="-228600">
+              <a:buFont typeface="Calibri"/>
               <a:spcAft>
                 <a:spcPts val="1000"/>
               </a:spcAft>
+              <a:buSzPct val="100000"/>
               <a:buChar char="•"/>
               <a:lnSpc>
                 <a:spcPts val="2200"/>
@@ -7500,10 +7564,12 @@
           </a:bodyPr>
           <a:lstStyle/>
           <a:p>
-            <a:pPr>
+            <a:pPr lvl="0" marL="457200" indent="-228600">
+              <a:buFont typeface="Calibri"/>
               <a:spcAft>
                 <a:spcPts val="1000"/>
               </a:spcAft>
+              <a:buSzPct val="100000"/>
               <a:buChar char="•"/>
               <a:lnSpc>
                 <a:spcPts val="2200"/>
@@ -7520,10 +7586,12 @@
             </a:r>
           </a:p>
           <a:p>
-            <a:pPr>
+            <a:pPr lvl="0" marL="457200" indent="-228600">
+              <a:buFont typeface="Calibri"/>
               <a:spcAft>
                 <a:spcPts val="1000"/>
               </a:spcAft>
+              <a:buSzPct val="100000"/>
               <a:buChar char="•"/>
               <a:lnSpc>
                 <a:spcPts val="2200"/>
@@ -7540,10 +7608,12 @@
             </a:r>
           </a:p>
           <a:p>
-            <a:pPr>
+            <a:pPr lvl="0" marL="457200" indent="-228600">
+              <a:buFont typeface="Calibri"/>
               <a:spcAft>
                 <a:spcPts val="1000"/>
               </a:spcAft>
+              <a:buSzPct val="100000"/>
               <a:buChar char="•"/>
               <a:lnSpc>
                 <a:spcPts val="2200"/>
@@ -7560,10 +7630,12 @@
             </a:r>
           </a:p>
           <a:p>
-            <a:pPr>
+            <a:pPr lvl="0" marL="457200" indent="-228600">
+              <a:buFont typeface="Calibri"/>
               <a:spcAft>
                 <a:spcPts val="1000"/>
               </a:spcAft>
+              <a:buSzPct val="100000"/>
               <a:buChar char="•"/>
               <a:lnSpc>
                 <a:spcPts val="2200"/>
@@ -7580,10 +7652,12 @@
             </a:r>
           </a:p>
           <a:p>
-            <a:pPr>
+            <a:pPr lvl="0" marL="457200" indent="-228600">
+              <a:buFont typeface="Calibri"/>
               <a:spcAft>
                 <a:spcPts val="1000"/>
               </a:spcAft>
+              <a:buSzPct val="100000"/>
               <a:buChar char="•"/>
               <a:lnSpc>
                 <a:spcPts val="2200"/>
